--- a/curso/pptx/S87.pptx
+++ b/curso/pptx/S87.pptx
@@ -3799,7 +3799,7 @@
                 </a:solidFill>
                 <a:latin typeface="Nunito Sans"/>
               </a:rPr>
-              <a:t>Toda la cuadrilla de Leire lleva la misma sudadera. A Leire no le encanta, pero la pide para su cumpleaños. (Ejemplo inventado.)</a:t>
+              <a:t>Toda la cuadrilla de una chica lleva la misma sudadera. A ella no le encanta, pero la pide para su cumpleaños. (Ejemplo inventado.)</a:t>
             </a:r>
           </a:p>
         </p:txBody>
@@ -4126,7 +4126,7 @@
                 </a:solidFill>
                 <a:latin typeface="Nunito Sans"/>
               </a:rPr>
-              <a:t>Dylan va a correr la carrera del instituto con unas zapatillas de moda: «Las lleva todo el mundo, así que serán las mejores para correr».</a:t>
+              <a:t>Un chico va a correr la carrera del instituto con unas zapatillas de moda: «Las lleva todo el mundo, así que serán las mejores para correr».</a:t>
             </a:r>
           </a:p>
         </p:txBody>
@@ -4489,7 +4489,7 @@
                 </a:solidFill>
                 <a:latin typeface="Nunito Sans"/>
               </a:rPr>
-              <a:t>Kevin dice: «El rosa siempre ha sido de chicas y el azul, de chicos. Es natural».</a:t>
+              <a:t>Un chico dice: «El rosa siempre ha sido de chicas y el azul, de chicos. Es natural».</a:t>
             </a:r>
           </a:p>
         </p:txBody>
@@ -4816,7 +4816,7 @@
                 </a:solidFill>
                 <a:latin typeface="Nunito Sans"/>
               </a:rPr>
-              <a:t>Aitor viste siempre de negro, como los fans de su grupo de música favorito. «Yo no sigo modas: los que las siguen son borregos», dice. (Ejemplo inventado.)</a:t>
+              <a:t>Un chico viste siempre de negro, como los fans de su grupo de música favorito. «Yo no sigo modas: los que las siguen son borregos», dice. (Ejemplo inventado.)</a:t>
             </a:r>
           </a:p>
         </p:txBody>
@@ -4864,7 +4864,7 @@
                 </a:solidFill>
                 <a:latin typeface="Nunito Sans"/>
               </a:rPr>
-              <a:t>¿Está Aitor fuera de las modas?</a:t>
+              <a:t>¿Está ese chico fuera de las modas?</a:t>
             </a:r>
           </a:p>
           <a:p>

--- a/curso/pptx/S87.pptx
+++ b/curso/pptx/S87.pptx
@@ -3535,7 +3535,7 @@
                 </a:solidFill>
                 <a:latin typeface="Nunito Sans"/>
               </a:rPr>
-              <a:t>PENSAMIENTO CRÍTICO · SESIÓN 87 · UNIDAD 20 · MODAS, OCIO Y FUTURO</a:t>
+              <a:t>PENSAMIENTO CRÍTICO · SESIÓN 87 · UNIDAD 20 · NÚMEROS QUE ENGAÑAN</a:t>
             </a:r>
           </a:p>
         </p:txBody>
@@ -3574,7 +3574,7 @@
                 </a:solidFill>
                 <a:latin typeface="Fredoka"/>
               </a:rPr>
-              <a:t>¿Por qué seguimos las modas?</a:t>
+              <a:t>Porcentajes y cifras</a:t>
             </a:r>
           </a:p>
         </p:txBody>
@@ -3613,7 +3613,7 @@
                 </a:solidFill>
                 <a:latin typeface="Nunito Sans"/>
               </a:rPr>
-              <a:t>Seguimos las modas para pertenecer y para distinguirnos; pensar bien es ver por qué las sigo y separar lo que se lleva de lo bueno.</a:t>
+              <a:t>Una cifra sola puede engañar: «el doble» de casi nada sigue siendo casi nada, así que hay que preguntar «¿de cuántos?».</a:t>
             </a:r>
           </a:p>
         </p:txBody>
@@ -3717,7 +3717,7 @@
                 </a:solidFill>
                 <a:latin typeface="Fredoka"/>
               </a:rPr>
-              <a:t>Caso 1 · La sudadera de la cuadrilla</a:t>
+              <a:t>Caso 1 · El patinete</a:t>
             </a:r>
           </a:p>
         </p:txBody>
@@ -3799,7 +3799,7 @@
                 </a:solidFill>
                 <a:latin typeface="Nunito Sans"/>
               </a:rPr>
-              <a:t>Toda la cuadrilla de una chica lleva la misma sudadera. A ella no le encanta, pero la pide para su cumpleaños. (Ejemplo inventado.)</a:t>
+              <a:t>El titular del principio: «¡Los accidentes con patinete en el barrio han subido un 100 %!» (Ejemplo inventado.)</a:t>
             </a:r>
           </a:p>
         </p:txBody>
@@ -3847,25 +3847,7 @@
                 </a:solidFill>
                 <a:latin typeface="Nunito Sans"/>
               </a:rPr>
-              <a:t>¿Por qué la quiere? No por la sudadera: por </a:t>
-            </a:r>
-            <a:r>
-              <a:rPr sz="2400" b="1">
-                <a:solidFill>
-                  <a:srgbClr val="1F2A44"/>
-                </a:solidFill>
-                <a:latin typeface="Nunito Sans"/>
-              </a:rPr>
-              <a:t>pertenecer</a:t>
-            </a:r>
-            <a:r>
-              <a:rPr sz="2400" b="0">
-                <a:solidFill>
-                  <a:srgbClr val="1F2A44"/>
-                </a:solidFill>
-                <a:latin typeface="Nunito Sans"/>
-              </a:rPr>
-              <a:t> al grupo.</a:t>
+              <a:t>¿Qué significa subir un 100 %? Que ahora hay el doble que antes.</a:t>
             </a:r>
           </a:p>
           <a:p>
@@ -3890,7 +3872,7 @@
                 </a:solidFill>
                 <a:latin typeface="Nunito Sans"/>
               </a:rPr>
-              <a:t>Querer pertenecer es muy humano. No es un error ni una tontería.</a:t>
+              <a:t>¿El doble de cuánto? Miro el dato: el año pasado hubo 2 accidentes; este año, 4.</a:t>
             </a:r>
           </a:p>
           <a:p>
@@ -3915,7 +3897,7 @@
                 </a:solidFill>
                 <a:latin typeface="Nunito Sans"/>
               </a:rPr>
-              <a:t>La pregunta crítica: ¿la quiero por lo que es o por lo que dice de mí?</a:t>
+              <a:t>Son 2 accidentes más. Importa, pero con números tan pequeños no es una ola de accidentes.</a:t>
             </a:r>
           </a:p>
           <a:p>
@@ -3940,7 +3922,7 @@
                 </a:solidFill>
                 <a:latin typeface="Nunito Sans"/>
               </a:rPr>
-              <a:t>Conclusión: seguir una moda puede estar bien. Lo importante es saber por qué la sigo.</a:t>
+              <a:t>Conclusión: un porcentaje sin la cifra de partida puede asustar sin motivo. Pregunto «¿de cuántos?».</a:t>
             </a:r>
           </a:p>
         </p:txBody>
@@ -4044,7 +4026,7 @@
                 </a:solidFill>
                 <a:latin typeface="Fredoka"/>
               </a:rPr>
-              <a:t>Caso 2 · «Si todos las llevan, serán las mejores»</a:t>
+              <a:t>Caso 2 · El yogur</a:t>
             </a:r>
           </a:p>
         </p:txBody>
@@ -4126,7 +4108,7 @@
                 </a:solidFill>
                 <a:latin typeface="Nunito Sans"/>
               </a:rPr>
-              <a:t>Un chico va a correr la carrera del instituto con unas zapatillas de moda: «Las lleva todo el mundo, así que serán las mejores para correr».</a:t>
+              <a:t>Un anuncio: «Ahora con un 30 % menos de azúcar». (Ejemplo inventado.)</a:t>
             </a:r>
           </a:p>
         </p:txBody>
@@ -4174,25 +4156,7 @@
                 </a:solidFill>
                 <a:latin typeface="Nunito Sans"/>
               </a:rPr>
-              <a:t>Es la </a:t>
-            </a:r>
-            <a:r>
-              <a:rPr sz="2400" b="1">
-                <a:solidFill>
-                  <a:srgbClr val="1F2A44"/>
-                </a:solidFill>
-                <a:latin typeface="Nunito Sans"/>
-              </a:rPr>
-              <a:t>prueba social</a:t>
-            </a:r>
-            <a:r>
-              <a:rPr sz="2400" b="0">
-                <a:solidFill>
-                  <a:srgbClr val="1F2A44"/>
-                </a:solidFill>
-                <a:latin typeface="Nunito Sans"/>
-              </a:rPr>
-              <a:t> (sesión 28): copiar a los demás cuando no sabemos qué hacer.</a:t>
+              <a:t>¿Un 30 % menos que qué? ¿Que el yogur de antes? ¿Que otra marca?</a:t>
             </a:r>
           </a:p>
           <a:p>
@@ -4217,43 +4181,7 @@
                 </a:solidFill>
                 <a:latin typeface="Nunito Sans"/>
               </a:rPr>
-              <a:t>Pero la moda dice qué </a:t>
-            </a:r>
-            <a:r>
-              <a:rPr sz="2400" b="1">
-                <a:solidFill>
-                  <a:srgbClr val="1F2A44"/>
-                </a:solidFill>
-                <a:latin typeface="Nunito Sans"/>
-              </a:rPr>
-              <a:t>se lleva</a:t>
-            </a:r>
-            <a:r>
-              <a:rPr sz="2400" b="0">
-                <a:solidFill>
-                  <a:srgbClr val="1F2A44"/>
-                </a:solidFill>
-                <a:latin typeface="Nunito Sans"/>
-              </a:rPr>
-              <a:t>, no qué es </a:t>
-            </a:r>
-            <a:r>
-              <a:rPr sz="2400" b="1">
-                <a:solidFill>
-                  <a:srgbClr val="1F2A44"/>
-                </a:solidFill>
-                <a:latin typeface="Nunito Sans"/>
-              </a:rPr>
-              <a:t>bueno</a:t>
-            </a:r>
-            <a:r>
-              <a:rPr sz="2400" b="0">
-                <a:solidFill>
-                  <a:srgbClr val="1F2A44"/>
-                </a:solidFill>
-                <a:latin typeface="Nunito Sans"/>
-              </a:rPr>
-              <a:t> para correr.</a:t>
+              <a:t>Imagina que antes tenía 20 gramos de azúcar. Un 30 % menos son 14 gramos.</a:t>
             </a:r>
           </a:p>
           <a:p>
@@ -4278,7 +4206,7 @@
                 </a:solidFill>
                 <a:latin typeface="Nunito Sans"/>
               </a:rPr>
-              <a:t>¿Cómo lo sabe? Mejor preguntar a alguien que corre o buscar pruebas.</a:t>
+              <a:t>14 gramos sigue siendo bastante azúcar para un yogur pequeño.</a:t>
             </a:r>
           </a:p>
           <a:p>
@@ -4303,7 +4231,7 @@
                 </a:solidFill>
                 <a:latin typeface="Nunito Sans"/>
               </a:rPr>
-              <a:t>Conclusión: que algo esté de moda es una pista de que gusta, no de que funcione.</a:t>
+              <a:t>Conclusión: «menos» no significa «poco». Hay que mirar la cifra de verdad en la etiqueta.</a:t>
             </a:r>
           </a:p>
         </p:txBody>
@@ -4407,7 +4335,7 @@
                 </a:solidFill>
                 <a:latin typeface="Fredoka"/>
               </a:rPr>
-              <a:t>Caso 3 · ¿El rosa es de chicas?</a:t>
+              <a:t>Caso 3 · Dos institutos</a:t>
             </a:r>
           </a:p>
         </p:txBody>
@@ -4489,7 +4417,7 @@
                 </a:solidFill>
                 <a:latin typeface="Nunito Sans"/>
               </a:rPr>
-              <a:t>Un chico dice: «El rosa siempre ha sido de chicas y el azul, de chicos. Es natural».</a:t>
+              <a:t>En el instituto A hay 20 aprobados. En el instituto B hay 15. ¿Qué instituto lo hizo mejor? (Ejemplo inventado.)</a:t>
             </a:r>
           </a:p>
         </p:txBody>
@@ -4537,7 +4465,7 @@
                 </a:solidFill>
                 <a:latin typeface="Nunito Sans"/>
               </a:rPr>
-              <a:t>¿Cómo lo sabe? Mira a su alrededor y generaliza (sesión 19).</a:t>
+              <a:t>La cifra absoluta dice que A tiene más aprobados.</a:t>
             </a:r>
           </a:p>
           <a:p>
@@ -4562,7 +4490,7 @@
                 </a:solidFill>
                 <a:latin typeface="Nunito Sans"/>
               </a:rPr>
-              <a:t>La historiadora Jo Paoletti cuenta que hace unos cien años algunas tiendas de EE. UU. recomendaban rosa para niños.</a:t>
+              <a:t>Pero pregunto el total: A tiene 40 alumnos y B tiene 20.</a:t>
             </a:r>
           </a:p>
           <a:p>
@@ -4587,7 +4515,7 @@
                 </a:solidFill>
                 <a:latin typeface="Nunito Sans"/>
               </a:rPr>
-              <a:t>Y azul para niñas. Los colores «de chico» y «de chica» han cambiado con el tiempo.</a:t>
+              <a:t>A: 20 de 40 = 50 %. B: 15 de 20 = 75 %.</a:t>
             </a:r>
           </a:p>
           <a:p>
@@ -4612,25 +4540,7 @@
                 </a:solidFill>
                 <a:latin typeface="Nunito Sans"/>
               </a:rPr>
-              <a:t>Conclusión: muchos roles de la moda son </a:t>
-            </a:r>
-            <a:r>
-              <a:rPr sz="2400" b="1">
-                <a:solidFill>
-                  <a:srgbClr val="1F2A44"/>
-                </a:solidFill>
-                <a:latin typeface="Nunito Sans"/>
-              </a:rPr>
-              <a:t>costumbres</a:t>
-            </a:r>
-            <a:r>
-              <a:rPr sz="2400" b="0">
-                <a:solidFill>
-                  <a:srgbClr val="1F2A44"/>
-                </a:solidFill>
-                <a:latin typeface="Nunito Sans"/>
-              </a:rPr>
-              <a:t>, no naturaleza. Cada uno puede vestir como quiera.</a:t>
+              <a:t>Conclusión: B lo hizo mejor. Para comparar grupos de distinto tamaño hace falta la cifra relativa.</a:t>
             </a:r>
           </a:p>
         </p:txBody>
@@ -4734,7 +4644,7 @@
                 </a:solidFill>
                 <a:latin typeface="Fredoka"/>
               </a:rPr>
-              <a:t>⚠ «Yo no sigo modas»</a:t>
+              <a:t>⚠ ¿Suben un 10 %?</a:t>
             </a:r>
           </a:p>
         </p:txBody>
@@ -4816,7 +4726,7 @@
                 </a:solidFill>
                 <a:latin typeface="Nunito Sans"/>
               </a:rPr>
-              <a:t>Un chico viste siempre de negro, como los fans de su grupo de música favorito. «Yo no sigo modas: los que las siguen son borregos», dice. (Ejemplo inventado.)</a:t>
+              <a:t>En un instituto, los aprobados de inglés pasan del 40 % al 50 %. Titular: «¡Los aprobados suben un 10 %!». (Ejemplo inventado.)</a:t>
             </a:r>
           </a:p>
         </p:txBody>
@@ -4864,7 +4774,7 @@
                 </a:solidFill>
                 <a:latin typeface="Nunito Sans"/>
               </a:rPr>
-              <a:t>¿Está ese chico fuera de las modas?</a:t>
+              <a:t>50 menos 40 son 10. ¿Han subido un 10 %?</a:t>
             </a:r>
           </a:p>
           <a:p>
@@ -4889,7 +4799,25 @@
                 </a:solidFill>
                 <a:latin typeface="Nunito Sans"/>
               </a:rPr>
-              <a:t>Parece que sí: no lleva lo que lleva la mayoría.</a:t>
+              <a:t>Del 40 % al 50 % hay 10 </a:t>
+            </a:r>
+            <a:r>
+              <a:rPr sz="2400" b="1">
+                <a:solidFill>
+                  <a:srgbClr val="1F2A44"/>
+                </a:solidFill>
+                <a:latin typeface="Nunito Sans"/>
+              </a:rPr>
+              <a:t>puntos</a:t>
+            </a:r>
+            <a:r>
+              <a:rPr sz="2400" b="0">
+                <a:solidFill>
+                  <a:srgbClr val="1F2A44"/>
+                </a:solidFill>
+                <a:latin typeface="Nunito Sans"/>
+              </a:rPr>
+              <a:t>: es la resta de los dos porcentajes.</a:t>
             </a:r>
           </a:p>
           <a:p>
@@ -4914,7 +4842,7 @@
                 </a:solidFill>
                 <a:latin typeface="Nunito Sans"/>
               </a:rPr>
-              <a:t>Pero viste igual que los fans de su grupo: también se parece a alguien.</a:t>
+              <a:t>Pero en proporción: 10 más sobre 40 es la cuarta parte. Los aprobados han subido un 25 %.</a:t>
             </a:r>
           </a:p>
           <a:p>
@@ -4939,7 +4867,7 @@
                 </a:solidFill>
                 <a:latin typeface="Nunito Sans"/>
               </a:rPr>
-              <a:t>Es la otra cara de Simmel: distinguirse de unos es parecerse a otros. Y llamar «borregos» a todos es un estereotipo.</a:t>
+              <a:t>Las dos cifras son verdad, pero dicen cosas distintas. El titular las mezcla.</a:t>
             </a:r>
           </a:p>
           <a:p>
@@ -4964,25 +4892,7 @@
                 </a:solidFill>
                 <a:latin typeface="Nunito Sans"/>
               </a:rPr>
-              <a:t>Conclusión: ir contra una moda también puede ser seguir la moda de </a:t>
-            </a:r>
-            <a:r>
-              <a:rPr sz="2400" b="1">
-                <a:solidFill>
-                  <a:srgbClr val="1F2A44"/>
-                </a:solidFill>
-                <a:latin typeface="Nunito Sans"/>
-              </a:rPr>
-              <a:t>otro</a:t>
-            </a:r>
-            <a:r>
-              <a:rPr sz="2400" b="0">
-                <a:solidFill>
-                  <a:srgbClr val="1F2A44"/>
-                </a:solidFill>
-                <a:latin typeface="Nunito Sans"/>
-              </a:rPr>
-              <a:t> grupo. Nadie está del todo fuera.</a:t>
+              <a:t>Conclusión: subir 10 puntos no es subir un 10 %. Pregunto: ¿puntos o por ciento?</a:t>
             </a:r>
           </a:p>
         </p:txBody>
@@ -5238,7 +5148,7 @@
                 </a:solidFill>
                 <a:latin typeface="Nunito Sans"/>
               </a:rPr>
-              <a:t>La moda junta dos ganas: pertenecer a un grupo y distinguirse de otros.</a:t>
+              <a:t>Un porcentaje dice cuántos hay de cada 100, y siempre es un porcentaje de algo.</a:t>
             </a:r>
           </a:p>
           <a:p>
@@ -5263,7 +5173,7 @@
                 </a:solidFill>
                 <a:latin typeface="Nunito Sans"/>
               </a:rPr>
-              <a:t>Que algo esté de moda dice que gusta, no que sea bueno ni verdad.</a:t>
+              <a:t>«El doble» de casi nada sigue siendo casi nada: pregunta «¿de cuántos?».</a:t>
             </a:r>
           </a:p>
           <a:p>
@@ -5288,7 +5198,7 @@
                 </a:solidFill>
                 <a:latin typeface="Nunito Sans"/>
               </a:rPr>
-              <a:t>Muchos roles de la moda son costumbres que cambian; la ropa no es la persona entera.</a:t>
+              <a:t>No confundas puntos con por ciento: del 40 % al 50 % son 10 puntos, un 25 % más.</a:t>
             </a:r>
           </a:p>
         </p:txBody>
@@ -5392,7 +5302,7 @@
                 </a:solidFill>
                 <a:latin typeface="Fredoka"/>
               </a:rPr>
-              <a:t>Por qué seguimos las modas: imitar al grupo y distinguirse de otros</a:t>
+              <a:t>Cómo engañan los porcentajes en noticias y anuncios</a:t>
             </a:r>
           </a:p>
         </p:txBody>
@@ -5431,7 +5341,7 @@
                 </a:solidFill>
                 <a:latin typeface="Nunito Sans"/>
               </a:rPr>
-              <a:t>Ver con más ejemplos cómo la moda junta las ganas de pertenecer y de distinguirse.</a:t>
+              <a:t>Ver más ejemplos de cifras que suenan grandes y en realidad son pequeñas.</a:t>
             </a:r>
           </a:p>
         </p:txBody>
@@ -6089,7 +5999,7 @@
                 </a:solidFill>
                 <a:latin typeface="Nunito Sans"/>
               </a:rPr>
-              <a:t>La palabra «aporofobia» la creó la filósofa Adela ______.  (sesión 86)</a:t>
+              <a:t>En España, la enseñanza es ______ hasta los 16 años.  (sesión 86)</a:t>
             </a:r>
           </a:p>
           <a:p>
@@ -6114,7 +6024,7 @@
                 </a:solidFill>
                 <a:latin typeface="Nunito Sans"/>
               </a:rPr>
-              <a:t>Un ______ es juzgar a una persona antes de conocerla, solo por su grupo.  (sesión 86)</a:t>
+              <a:t>Al elegir estudios, coincidir con el grupo no es el error; el error es que el grupo sea la ______ razón.  (sesión 86)</a:t>
             </a:r>
           </a:p>
           <a:p>
@@ -6139,7 +6049,7 @@
                 </a:solidFill>
                 <a:latin typeface="Nunito Sans"/>
               </a:rPr>
-              <a:t>Las emociones no son buenas ni malas: son agradables o ______.  (sesión 75)</a:t>
+              <a:t>La amistad por ______ quiere el bien del otro por la persona misma.  (sesión 75)</a:t>
             </a:r>
           </a:p>
         </p:txBody>
@@ -6291,7 +6201,7 @@
                 </a:solidFill>
                 <a:latin typeface="Nunito Sans"/>
               </a:rPr>
-              <a:t>La palabra «aporofobia» la creó la filósofa Adela </a:t>
+              <a:t>En España, la enseñanza es </a:t>
             </a:r>
             <a:r>
               <a:rPr sz="2600" b="1">
@@ -6300,7 +6210,7 @@
                 </a:solidFill>
                 <a:latin typeface="Nunito Sans"/>
               </a:rPr>
-              <a:t>Cortina</a:t>
+              <a:t>obligatoria</a:t>
             </a:r>
             <a:r>
               <a:rPr sz="2600" b="0">
@@ -6309,7 +6219,7 @@
                 </a:solidFill>
                 <a:latin typeface="Nunito Sans"/>
               </a:rPr>
-              <a:t>.  (sesión 86)</a:t>
+              <a:t> hasta los 16 años.  (sesión 86)</a:t>
             </a:r>
           </a:p>
           <a:p>
@@ -6334,7 +6244,7 @@
                 </a:solidFill>
                 <a:latin typeface="Nunito Sans"/>
               </a:rPr>
-              <a:t>Un </a:t>
+              <a:t>Al elegir estudios, coincidir con el grupo no es el error; el error es que el grupo sea la </a:t>
             </a:r>
             <a:r>
               <a:rPr sz="2600" b="1">
@@ -6343,7 +6253,7 @@
                 </a:solidFill>
                 <a:latin typeface="Nunito Sans"/>
               </a:rPr>
-              <a:t>prejuicio</a:t>
+              <a:t>única</a:t>
             </a:r>
             <a:r>
               <a:rPr sz="2600" b="0">
@@ -6352,7 +6262,7 @@
                 </a:solidFill>
                 <a:latin typeface="Nunito Sans"/>
               </a:rPr>
-              <a:t> es juzgar a una persona antes de conocerla, solo por su grupo.  (sesión 86)</a:t>
+              <a:t> razón.  (sesión 86)</a:t>
             </a:r>
           </a:p>
           <a:p>
@@ -6377,7 +6287,7 @@
                 </a:solidFill>
                 <a:latin typeface="Nunito Sans"/>
               </a:rPr>
-              <a:t>Las emociones no son buenas ni malas: son agradables o </a:t>
+              <a:t>La amistad por </a:t>
             </a:r>
             <a:r>
               <a:rPr sz="2600" b="1">
@@ -6386,7 +6296,7 @@
                 </a:solidFill>
                 <a:latin typeface="Nunito Sans"/>
               </a:rPr>
-              <a:t>desagradables</a:t>
+              <a:t>virtud</a:t>
             </a:r>
             <a:r>
               <a:rPr sz="2600" b="0">
@@ -6395,7 +6305,7 @@
                 </a:solidFill>
                 <a:latin typeface="Nunito Sans"/>
               </a:rPr>
-              <a:t>.  (sesión 75)</a:t>
+              <a:t> quiere el bien del otro por la persona misma.  (sesión 75)</a:t>
             </a:r>
           </a:p>
         </p:txBody>
@@ -6542,7 +6452,7 @@
                 </a:solidFill>
                 <a:latin typeface="Nunito Sans"/>
               </a:rPr>
-              <a:t>Piensa en algo que hace dos años llevaba o hacía todo el mundo y que hoy ya «no se lleva».</a:t>
+              <a:t>«¡Los accidentes con patinete en nuestro barrio han subido un 100 %!» (Titular inventado.)</a:t>
             </a:r>
           </a:p>
         </p:txBody>
@@ -6581,7 +6491,7 @@
                 </a:solidFill>
                 <a:latin typeface="Nunito Sans"/>
               </a:rPr>
-              <a:t>¿Por qué gustaba entonces? ¿Qué ha cambiado: la cosa o el grupo?</a:t>
+              <a:t>¿Es mucho o poco? ¿Qué número te falta para saberlo?</a:t>
             </a:r>
           </a:p>
         </p:txBody>
@@ -6685,7 +6595,7 @@
                 </a:solidFill>
                 <a:latin typeface="Fredoka"/>
               </a:rPr>
-              <a:t>Moda e identidad</a:t>
+              <a:t>Cifras sueltas</a:t>
             </a:r>
           </a:p>
         </p:txBody>
@@ -6750,7 +6660,7 @@
                 </a:solidFill>
                 <a:latin typeface="Nunito Sans"/>
               </a:rPr>
-              <a:t>BLOQUE 1 · MODA E IDENTIDAD</a:t>
+              <a:t>BLOQUE 1 · CIFRAS SUELTAS</a:t>
             </a:r>
           </a:p>
         </p:txBody>
@@ -6789,7 +6699,7 @@
                 </a:solidFill>
                 <a:latin typeface="Fredoka"/>
               </a:rPr>
-              <a:t>Moda</a:t>
+              <a:t>Porcentaje</a:t>
             </a:r>
           </a:p>
         </p:txBody>
@@ -6871,7 +6781,7 @@
                 </a:solidFill>
                 <a:latin typeface="Nunito Sans"/>
               </a:rPr>
-              <a:t>Es una forma de vestir, hablar o hacer que se extiende en un grupo durante un tiempo y luego cambia.</a:t>
+              <a:t>Un porcentaje dice cuántos hay de cada 100. El 25 % significa 25 de cada 100.</a:t>
             </a:r>
           </a:p>
         </p:txBody>
@@ -6913,13 +6823,22 @@
               <a:t>• </a:t>
             </a:r>
             <a:r>
+              <a:rPr sz="2800" b="1">
+                <a:solidFill>
+                  <a:srgbClr val="1F2A44"/>
+                </a:solidFill>
+                <a:latin typeface="Nunito Sans"/>
+              </a:rPr>
+              <a:t>50 %</a:t>
+            </a:r>
+            <a:r>
               <a:rPr sz="2800" b="0">
                 <a:solidFill>
                   <a:srgbClr val="1F2A44"/>
                 </a:solidFill>
                 <a:latin typeface="Nunito Sans"/>
               </a:rPr>
-              <a:t>No solo ropa: música, bailes, palabras, apps, cortes de pelo</a:t>
+              <a:t> = la mitad</a:t>
             </a:r>
           </a:p>
           <a:p>
@@ -6938,13 +6857,22 @@
               <a:t>• </a:t>
             </a:r>
             <a:r>
+              <a:rPr sz="2800" b="1">
+                <a:solidFill>
+                  <a:srgbClr val="1F2A44"/>
+                </a:solidFill>
+                <a:latin typeface="Nunito Sans"/>
+              </a:rPr>
+              <a:t>25 %</a:t>
+            </a:r>
+            <a:r>
               <a:rPr sz="2800" b="0">
                 <a:solidFill>
                   <a:srgbClr val="1F2A44"/>
                 </a:solidFill>
                 <a:latin typeface="Nunito Sans"/>
               </a:rPr>
-              <a:t>Dura un tiempo: lo que hoy se lleva, mañana «ya no»</a:t>
+              <a:t> = la cuarta parte</a:t>
             </a:r>
           </a:p>
           <a:p>
@@ -6963,31 +6891,22 @@
               <a:t>• </a:t>
             </a:r>
             <a:r>
+              <a:rPr sz="2800" b="1">
+                <a:solidFill>
+                  <a:srgbClr val="1F2A44"/>
+                </a:solidFill>
+                <a:latin typeface="Nunito Sans"/>
+              </a:rPr>
+              <a:t>100 %</a:t>
+            </a:r>
+            <a:r>
               <a:rPr sz="2800" b="0">
                 <a:solidFill>
                   <a:srgbClr val="1F2A44"/>
                 </a:solidFill>
                 <a:latin typeface="Nunito Sans"/>
               </a:rPr>
-              <a:t>Dice algo de ti: es una </a:t>
-            </a:r>
-            <a:r>
-              <a:rPr sz="2800" b="1">
-                <a:solidFill>
-                  <a:srgbClr val="1F2A44"/>
-                </a:solidFill>
-                <a:latin typeface="Nunito Sans"/>
-              </a:rPr>
-              <a:t>señal</a:t>
-            </a:r>
-            <a:r>
-              <a:rPr sz="2800" b="0">
-                <a:solidFill>
-                  <a:srgbClr val="1F2A44"/>
-                </a:solidFill>
-                <a:latin typeface="Nunito Sans"/>
-              </a:rPr>
-              <a:t> de identidad</a:t>
+              <a:t> = todos</a:t>
             </a:r>
           </a:p>
           <a:p>
@@ -7006,22 +6925,22 @@
               <a:t>• </a:t>
             </a:r>
             <a:r>
+              <a:rPr sz="2800" b="0">
+                <a:solidFill>
+                  <a:srgbClr val="1F2A44"/>
+                </a:solidFill>
+                <a:latin typeface="Nunito Sans"/>
+              </a:rPr>
+              <a:t>Siempre es un porcentaje </a:t>
+            </a:r>
+            <a:r>
               <a:rPr sz="2800" b="1">
                 <a:solidFill>
                   <a:srgbClr val="1F2A44"/>
                 </a:solidFill>
                 <a:latin typeface="Nunito Sans"/>
               </a:rPr>
-              <a:t>Identidad:</a:t>
-            </a:r>
-            <a:r>
-              <a:rPr sz="2800" b="0">
-                <a:solidFill>
-                  <a:srgbClr val="1F2A44"/>
-                </a:solidFill>
-                <a:latin typeface="Nunito Sans"/>
-              </a:rPr>
-              <a:t> quién eres y de qué grupos te sientes parte</a:t>
+              <a:t>de algo</a:t>
             </a:r>
           </a:p>
         </p:txBody>
@@ -7086,7 +7005,7 @@
                 </a:solidFill>
                 <a:latin typeface="Nunito Sans"/>
               </a:rPr>
-              <a:t>BLOQUE 1 · MODA E IDENTIDAD</a:t>
+              <a:t>BLOQUE 1 · CIFRAS SUELTAS</a:t>
             </a:r>
           </a:p>
         </p:txBody>
@@ -7125,7 +7044,7 @@
                 </a:solidFill>
                 <a:latin typeface="Fredoka"/>
               </a:rPr>
-              <a:t>Pertenecer y distinguirse</a:t>
+              <a:t>Cifra absoluta y cifra relativa</a:t>
             </a:r>
           </a:p>
         </p:txBody>
@@ -7207,7 +7126,7 @@
                 </a:solidFill>
                 <a:latin typeface="Nunito Sans"/>
               </a:rPr>
-              <a:t>El sociólogo Georg Simmel (1905) vio que la moda junta dos ganas opuestas: parecerse a los demás y distinguirse.</a:t>
+              <a:t>La cifra absoluta dice cuántos hay. La cifra relativa compara con el total, por ejemplo con un porcentaje.</a:t>
             </a:r>
           </a:p>
         </p:txBody>
@@ -7255,7 +7174,7 @@
                 </a:solidFill>
                 <a:latin typeface="Nunito Sans"/>
               </a:rPr>
-              <a:t>Pertenecer:</a:t>
+              <a:t>Absoluta:</a:t>
             </a:r>
             <a:r>
               <a:rPr sz="2800" b="0">
@@ -7264,7 +7183,7 @@
                 </a:solidFill>
                 <a:latin typeface="Nunito Sans"/>
               </a:rPr>
-              <a:t> vestir como mi cuadrilla para ser «de los nuestros»</a:t>
+              <a:t> aprobaron 30 alumnos</a:t>
             </a:r>
           </a:p>
           <a:p>
@@ -7289,7 +7208,7 @@
                 </a:solidFill>
                 <a:latin typeface="Nunito Sans"/>
               </a:rPr>
-              <a:t>Distinguirse:</a:t>
+              <a:t>Relativa:</a:t>
             </a:r>
             <a:r>
               <a:rPr sz="2800" b="0">
@@ -7298,7 +7217,7 @@
                 </a:solidFill>
                 <a:latin typeface="Nunito Sans"/>
               </a:rPr>
-              <a:t> ser diferente de otros grupos o del resto</a:t>
+              <a:t> aprobó el 60 % (30 de 50)</a:t>
             </a:r>
           </a:p>
           <a:p>
@@ -7323,7 +7242,7 @@
                 </a:solidFill>
                 <a:latin typeface="Nunito Sans"/>
               </a:rPr>
-              <a:t>Cuando todos la llevan, ya no distingue… y llega otra moda</a:t>
+              <a:t>Hacen falta las dos para entender bien</a:t>
             </a:r>
           </a:p>
         </p:txBody>
@@ -7388,7 +7307,7 @@
                 </a:solidFill>
                 <a:latin typeface="Nunito Sans"/>
               </a:rPr>
-              <a:t>BLOQUE 1 · MODA E IDENTIDAD</a:t>
+              <a:t>BLOQUE 1 · CIFRAS SUELTAS</a:t>
             </a:r>
           </a:p>
         </p:txBody>
@@ -7427,234 +7346,310 @@
                 </a:solidFill>
                 <a:latin typeface="Fredoka"/>
               </a:rPr>
-              <a:t>Presiones y roles en la moda</a:t>
-            </a:r>
-          </a:p>
-        </p:txBody>
-      </p:sp>
-      <p:sp>
-        <p:nvSpPr>
-          <p:cNvPr id="4" name="TextBox 3"/>
-          <p:cNvSpPr txBox="1"/>
+              <a:t>«El doble» de casi nada (ejemplos inventados)</a:t>
+            </a:r>
+          </a:p>
+        </p:txBody>
+      </p:sp>
+      <p:graphicFrame>
+        <p:nvGraphicFramePr>
+          <p:cNvPr id="4" name="Table 3"/>
+          <p:cNvGraphicFramePr>
+            <a:graphicFrameLocks noGrp="1"/>
+          </p:cNvGraphicFramePr>
           <p:nvPr/>
-        </p:nvSpPr>
-        <p:spPr>
-          <a:xfrm>
-            <a:off x="840000" y="1730000"/>
-            <a:ext cx="10512000" cy="1000000"/>
-          </a:xfrm>
-          <a:prstGeom prst="rect">
-            <a:avLst/>
-          </a:prstGeom>
-          <a:noFill/>
-        </p:spPr>
-        <p:txBody>
-          <a:bodyPr wrap="square" anchor="ctr">
-            <a:spAutoFit/>
-          </a:bodyPr>
-          <a:lstStyle/>
-          <a:p>
-            <a:pPr>
-              <a:spcAft>
-                <a:spcPts val="1080"/>
-              </a:spcAft>
-            </a:pPr>
-            <a:r>
-              <a:rPr sz="2400" b="0">
-                <a:solidFill>
-                  <a:srgbClr val="1F2A44"/>
-                </a:solidFill>
-                <a:latin typeface="Nunito Sans"/>
-              </a:rPr>
-              <a:t>La moda puede ser un juego. También puede apretar:</a:t>
-            </a:r>
-          </a:p>
-        </p:txBody>
-      </p:sp>
-      <p:sp>
-        <p:nvSpPr>
-          <p:cNvPr id="5" name="TextBox 4"/>
-          <p:cNvSpPr txBox="1"/>
-          <p:nvPr/>
-        </p:nvSpPr>
-        <p:spPr>
-          <a:xfrm>
-            <a:off x="640000" y="3000000"/>
-            <a:ext cx="10912000" cy="3458000"/>
-          </a:xfrm>
-          <a:prstGeom prst="rect">
-            <a:avLst/>
-          </a:prstGeom>
-          <a:noFill/>
-        </p:spPr>
-        <p:txBody>
-          <a:bodyPr wrap="square">
-            <a:spAutoFit/>
-          </a:bodyPr>
-          <a:lstStyle/>
-          <a:p>
-            <a:pPr>
-              <a:spcAft>
-                <a:spcPts val="1260"/>
-              </a:spcAft>
-            </a:pPr>
-            <a:r>
-              <a:rPr sz="2800" b="1">
-                <a:solidFill>
-                  <a:srgbClr val="E8793A"/>
-                </a:solidFill>
-                <a:latin typeface="Nunito Sans"/>
-              </a:rPr>
-              <a:t>• </a:t>
-            </a:r>
-            <a:r>
-              <a:rPr sz="2800" b="1">
-                <a:solidFill>
-                  <a:srgbClr val="1F2A44"/>
-                </a:solidFill>
-                <a:latin typeface="Nunito Sans"/>
-              </a:rPr>
-              <a:t>Burlas</a:t>
-            </a:r>
-            <a:r>
-              <a:rPr sz="2800" b="0">
-                <a:solidFill>
-                  <a:srgbClr val="1F2A44"/>
-                </a:solidFill>
-                <a:latin typeface="Nunito Sans"/>
-              </a:rPr>
-              <a:t> a quien no lleva la marca o el estilo «que toca»</a:t>
-            </a:r>
-          </a:p>
-          <a:p>
-            <a:pPr>
-              <a:spcAft>
-                <a:spcPts val="1260"/>
-              </a:spcAft>
-            </a:pPr>
-            <a:r>
-              <a:rPr sz="2800" b="1">
-                <a:solidFill>
-                  <a:srgbClr val="E8793A"/>
-                </a:solidFill>
-                <a:latin typeface="Nunito Sans"/>
-              </a:rPr>
-              <a:t>• </a:t>
-            </a:r>
-            <a:r>
-              <a:rPr sz="2800" b="1">
-                <a:solidFill>
-                  <a:srgbClr val="1F2A44"/>
-                </a:solidFill>
-                <a:latin typeface="Nunito Sans"/>
-              </a:rPr>
-              <a:t>Gasto:</a:t>
-            </a:r>
-            <a:r>
-              <a:rPr sz="2800" b="0">
-                <a:solidFill>
-                  <a:srgbClr val="1F2A44"/>
-                </a:solidFill>
-                <a:latin typeface="Nunito Sans"/>
-              </a:rPr>
-              <a:t> pedir lo que la familia no puede pagar</a:t>
-            </a:r>
-          </a:p>
-          <a:p>
-            <a:pPr>
-              <a:spcAft>
-                <a:spcPts val="1260"/>
-              </a:spcAft>
-            </a:pPr>
-            <a:r>
-              <a:rPr sz="2800" b="1">
-                <a:solidFill>
-                  <a:srgbClr val="E8793A"/>
-                </a:solidFill>
-                <a:latin typeface="Nunito Sans"/>
-              </a:rPr>
-              <a:t>• </a:t>
-            </a:r>
-            <a:r>
-              <a:rPr sz="2800" b="1">
-                <a:solidFill>
-                  <a:srgbClr val="1F2A44"/>
-                </a:solidFill>
-                <a:latin typeface="Nunito Sans"/>
-              </a:rPr>
-              <a:t>Cuerpos retocados</a:t>
-            </a:r>
-            <a:r>
-              <a:rPr sz="2800" b="0">
-                <a:solidFill>
-                  <a:srgbClr val="1F2A44"/>
-                </a:solidFill>
-                <a:latin typeface="Nunito Sans"/>
-              </a:rPr>
-              <a:t> en fotos y anuncios: nadie es así de verdad</a:t>
-            </a:r>
-          </a:p>
-          <a:p>
-            <a:pPr>
-              <a:spcAft>
-                <a:spcPts val="1260"/>
-              </a:spcAft>
-            </a:pPr>
-            <a:r>
-              <a:rPr sz="2800" b="1">
-                <a:solidFill>
-                  <a:srgbClr val="E8793A"/>
-                </a:solidFill>
-                <a:latin typeface="Nunito Sans"/>
-              </a:rPr>
-              <a:t>• </a:t>
-            </a:r>
-            <a:r>
-              <a:rPr sz="2800" b="1">
-                <a:solidFill>
-                  <a:srgbClr val="1F2A44"/>
-                </a:solidFill>
-                <a:latin typeface="Nunito Sans"/>
-              </a:rPr>
-              <a:t>Roles:</a:t>
-            </a:r>
-            <a:r>
-              <a:rPr sz="2800" b="0">
-                <a:solidFill>
-                  <a:srgbClr val="1F2A44"/>
-                </a:solidFill>
-                <a:latin typeface="Nunito Sans"/>
-              </a:rPr>
-              <a:t> «esto es de chicos», «esto es de chicas»</a:t>
-            </a:r>
-          </a:p>
-          <a:p>
-            <a:pPr>
-              <a:spcAft>
-                <a:spcPts val="1260"/>
-              </a:spcAft>
-            </a:pPr>
-            <a:r>
-              <a:rPr sz="2800" b="1">
-                <a:solidFill>
-                  <a:srgbClr val="E8793A"/>
-                </a:solidFill>
-                <a:latin typeface="Nunito Sans"/>
-              </a:rPr>
-              <a:t>• </a:t>
-            </a:r>
-            <a:r>
-              <a:rPr sz="2800" b="0">
-                <a:solidFill>
-                  <a:srgbClr val="1F2A44"/>
-                </a:solidFill>
-                <a:latin typeface="Nunito Sans"/>
-              </a:rPr>
-              <a:t>Publicidad e influencers también empujan: lo vimos en las sesiones 50 y 51</a:t>
-            </a:r>
-          </a:p>
-        </p:txBody>
-      </p:sp>
+        </p:nvGraphicFramePr>
+        <p:xfrm>
+          <a:off x="640000" y="1700000"/>
+          <a:ext cx="10912000" cy="2400000"/>
+        </p:xfrm>
+        <a:graphic>
+          <a:graphicData uri="http://schemas.openxmlformats.org/drawingml/2006/table">
+            <a:tbl>
+              <a:tblPr firstRow="1" bandRow="1">
+                <a:tableStyleId>{5C22544A-7EE6-4342-B048-85BDC9FD1C3A}</a:tableStyleId>
+              </a:tblPr>
+              <a:tblGrid>
+                <a:gridCol w="3637333"/>
+                <a:gridCol w="3637333"/>
+                <a:gridCol w="3637334"/>
+              </a:tblGrid>
+              <a:tr h="600000">
+                <a:tc>
+                  <a:txBody>
+                    <a:bodyPr/>
+                    <a:lstStyle/>
+                    <a:p>
+                      <a:r>
+                        <a:rPr sz="2000" b="1">
+                          <a:solidFill>
+                            <a:srgbClr val="FBF7EF"/>
+                          </a:solidFill>
+                          <a:latin typeface="Fredoka"/>
+                        </a:rPr>
+                        <a:t>Titular</a:t>
+                      </a:r>
+                    </a:p>
+                  </a:txBody>
+                  <a:tcPr>
+                    <a:solidFill>
+                      <a:srgbClr val="1F2A44"/>
+                    </a:solidFill>
+                  </a:tcPr>
+                </a:tc>
+                <a:tc>
+                  <a:txBody>
+                    <a:bodyPr/>
+                    <a:lstStyle/>
+                    <a:p>
+                      <a:r>
+                        <a:rPr sz="2000" b="1">
+                          <a:solidFill>
+                            <a:srgbClr val="FBF7EF"/>
+                          </a:solidFill>
+                          <a:latin typeface="Fredoka"/>
+                        </a:rPr>
+                        <a:t>Antes → después</a:t>
+                      </a:r>
+                    </a:p>
+                  </a:txBody>
+                  <a:tcPr>
+                    <a:solidFill>
+                      <a:srgbClr val="1F2A44"/>
+                    </a:solidFill>
+                  </a:tcPr>
+                </a:tc>
+                <a:tc>
+                  <a:txBody>
+                    <a:bodyPr/>
+                    <a:lstStyle/>
+                    <a:p>
+                      <a:r>
+                        <a:rPr sz="2000" b="1">
+                          <a:solidFill>
+                            <a:srgbClr val="FBF7EF"/>
+                          </a:solidFill>
+                          <a:latin typeface="Fredoka"/>
+                        </a:rPr>
+                        <a:t>¿Mucho o poco?</a:t>
+                      </a:r>
+                    </a:p>
+                  </a:txBody>
+                  <a:tcPr>
+                    <a:solidFill>
+                      <a:srgbClr val="1F2A44"/>
+                    </a:solidFill>
+                  </a:tcPr>
+                </a:tc>
+              </a:tr>
+              <a:tr h="600000">
+                <a:tc>
+                  <a:txBody>
+                    <a:bodyPr/>
+                    <a:lstStyle/>
+                    <a:p>
+                      <a:r>
+                        <a:rPr sz="2000" b="0">
+                          <a:solidFill>
+                            <a:srgbClr val="1F2A44"/>
+                          </a:solidFill>
+                          <a:latin typeface="Nunito Sans"/>
+                        </a:rPr>
+                        <a:t>«¡Suben un 100 %!»</a:t>
+                      </a:r>
+                    </a:p>
+                  </a:txBody>
+                  <a:tcPr>
+                    <a:solidFill>
+                      <a:srgbClr val="FFFFFF"/>
+                    </a:solidFill>
+                  </a:tcPr>
+                </a:tc>
+                <a:tc>
+                  <a:txBody>
+                    <a:bodyPr/>
+                    <a:lstStyle/>
+                    <a:p>
+                      <a:r>
+                        <a:rPr sz="2000" b="0">
+                          <a:solidFill>
+                            <a:srgbClr val="1F2A44"/>
+                          </a:solidFill>
+                          <a:latin typeface="Nunito Sans"/>
+                        </a:rPr>
+                        <a:t>1 caso → 2 casos</a:t>
+                      </a:r>
+                    </a:p>
+                  </a:txBody>
+                  <a:tcPr>
+                    <a:solidFill>
+                      <a:srgbClr val="FFFFFF"/>
+                    </a:solidFill>
+                  </a:tcPr>
+                </a:tc>
+                <a:tc>
+                  <a:txBody>
+                    <a:bodyPr/>
+                    <a:lstStyle/>
+                    <a:p>
+                      <a:r>
+                        <a:rPr sz="2000" b="0">
+                          <a:solidFill>
+                            <a:srgbClr val="1F2A44"/>
+                          </a:solidFill>
+                          <a:latin typeface="Nunito Sans"/>
+                        </a:rPr>
+                        <a:t>Casi nada: 1 caso más</a:t>
+                      </a:r>
+                    </a:p>
+                  </a:txBody>
+                  <a:tcPr>
+                    <a:solidFill>
+                      <a:srgbClr val="FFFFFF"/>
+                    </a:solidFill>
+                  </a:tcPr>
+                </a:tc>
+              </a:tr>
+              <a:tr h="600000">
+                <a:tc>
+                  <a:txBody>
+                    <a:bodyPr/>
+                    <a:lstStyle/>
+                    <a:p>
+                      <a:r>
+                        <a:rPr sz="2000" b="0">
+                          <a:solidFill>
+                            <a:srgbClr val="1F2A44"/>
+                          </a:solidFill>
+                          <a:latin typeface="Nunito Sans"/>
+                        </a:rPr>
+                        <a:t>«¡Bajan un 50 %!»</a:t>
+                      </a:r>
+                    </a:p>
+                  </a:txBody>
+                  <a:tcPr>
+                    <a:solidFill>
+                      <a:srgbClr val="EAF0F7"/>
+                    </a:solidFill>
+                  </a:tcPr>
+                </a:tc>
+                <a:tc>
+                  <a:txBody>
+                    <a:bodyPr/>
+                    <a:lstStyle/>
+                    <a:p>
+                      <a:r>
+                        <a:rPr sz="2000" b="0">
+                          <a:solidFill>
+                            <a:srgbClr val="1F2A44"/>
+                          </a:solidFill>
+                          <a:latin typeface="Nunito Sans"/>
+                        </a:rPr>
+                        <a:t>2.000 → 1.000</a:t>
+                      </a:r>
+                    </a:p>
+                  </a:txBody>
+                  <a:tcPr>
+                    <a:solidFill>
+                      <a:srgbClr val="EAF0F7"/>
+                    </a:solidFill>
+                  </a:tcPr>
+                </a:tc>
+                <a:tc>
+                  <a:txBody>
+                    <a:bodyPr/>
+                    <a:lstStyle/>
+                    <a:p>
+                      <a:r>
+                        <a:rPr sz="2000" b="0">
+                          <a:solidFill>
+                            <a:srgbClr val="1F2A44"/>
+                          </a:solidFill>
+                          <a:latin typeface="Nunito Sans"/>
+                        </a:rPr>
+                        <a:t>Mucho: 1.000 menos</a:t>
+                      </a:r>
+                    </a:p>
+                  </a:txBody>
+                  <a:tcPr>
+                    <a:solidFill>
+                      <a:srgbClr val="EAF0F7"/>
+                    </a:solidFill>
+                  </a:tcPr>
+                </a:tc>
+              </a:tr>
+              <a:tr h="600000">
+                <a:tc>
+                  <a:txBody>
+                    <a:bodyPr/>
+                    <a:lstStyle/>
+                    <a:p>
+                      <a:r>
+                        <a:rPr sz="2000" b="0">
+                          <a:solidFill>
+                            <a:srgbClr val="1F2A44"/>
+                          </a:solidFill>
+                          <a:latin typeface="Nunito Sans"/>
+                        </a:rPr>
+                        <a:t>«¡El triple de riesgo!»</a:t>
+                      </a:r>
+                    </a:p>
+                  </a:txBody>
+                  <a:tcPr>
+                    <a:solidFill>
+                      <a:srgbClr val="FFFFFF"/>
+                    </a:solidFill>
+                  </a:tcPr>
+                </a:tc>
+                <a:tc>
+                  <a:txBody>
+                    <a:bodyPr/>
+                    <a:lstStyle/>
+                    <a:p>
+                      <a:r>
+                        <a:rPr sz="2000" b="0">
+                          <a:solidFill>
+                            <a:srgbClr val="1F2A44"/>
+                          </a:solidFill>
+                          <a:latin typeface="Nunito Sans"/>
+                        </a:rPr>
+                        <a:t>1 de cada 10.000 → 3 de cada 10.000</a:t>
+                      </a:r>
+                    </a:p>
+                  </a:txBody>
+                  <a:tcPr>
+                    <a:solidFill>
+                      <a:srgbClr val="FFFFFF"/>
+                    </a:solidFill>
+                  </a:tcPr>
+                </a:tc>
+                <a:tc>
+                  <a:txBody>
+                    <a:bodyPr/>
+                    <a:lstStyle/>
+                    <a:p>
+                      <a:r>
+                        <a:rPr sz="2000" b="0">
+                          <a:solidFill>
+                            <a:srgbClr val="1F2A44"/>
+                          </a:solidFill>
+                          <a:latin typeface="Nunito Sans"/>
+                        </a:rPr>
+                        <a:t>Riesgo relativo: triple. Absoluto: sigue siendo muy raro</a:t>
+                      </a:r>
+                    </a:p>
+                  </a:txBody>
+                  <a:tcPr>
+                    <a:solidFill>
+                      <a:srgbClr val="FFFFFF"/>
+                    </a:solidFill>
+                  </a:tcPr>
+                </a:tc>
+              </a:tr>
+            </a:tbl>
+          </a:graphicData>
+        </a:graphic>
+      </p:graphicFrame>
     </p:spTree>
   </p:cSld>
   <p:clrMapOvr>
